--- a/Defensa_GII_SergioTorresRivero.pptx
+++ b/Defensa_GII_SergioTorresRivero.pptx
@@ -6064,7 +6064,7 @@
           </a:bodyPr>
           <a:lstStyle/>
           <a:p>
-            <a:pPr marL="0" marR="0" lvl="0" indent="0" algn="l" defTabSz="914400" rtl="0" eaLnBrk="0" fontAlgn="base" latinLnBrk="0" hangingPunct="0">
+            <a:pPr marL="0" marR="0" lvl="0" indent="0" defTabSz="914400" rtl="0" eaLnBrk="0" fontAlgn="base" latinLnBrk="0" hangingPunct="0">
               <a:lnSpc>
                 <a:spcPct val="100000"/>
               </a:lnSpc>
@@ -6103,7 +6103,7 @@
             </a:endParaRPr>
           </a:p>
           <a:p>
-            <a:pPr marL="742950" lvl="1" indent="-285750" eaLnBrk="0" fontAlgn="base" hangingPunct="0">
+            <a:pPr marL="742950" lvl="1" indent="-285750" algn="just" eaLnBrk="0" fontAlgn="base" hangingPunct="0">
               <a:lnSpc>
                 <a:spcPct val="100000"/>
               </a:lnSpc>
@@ -6131,7 +6131,7 @@
             </a:r>
           </a:p>
           <a:p>
-            <a:pPr marL="742950" lvl="1" indent="-285750" eaLnBrk="0" fontAlgn="base" hangingPunct="0">
+            <a:pPr marL="742950" lvl="1" indent="-285750" algn="just" eaLnBrk="0" fontAlgn="base" hangingPunct="0">
               <a:lnSpc>
                 <a:spcPct val="100000"/>
               </a:lnSpc>
@@ -6159,7 +6159,7 @@
             </a:r>
           </a:p>
           <a:p>
-            <a:pPr marL="742950" lvl="1" indent="-285750" eaLnBrk="0" fontAlgn="base" hangingPunct="0">
+            <a:pPr marL="742950" lvl="1" indent="-285750" algn="just" eaLnBrk="0" fontAlgn="base" hangingPunct="0">
               <a:lnSpc>
                 <a:spcPct val="100000"/>
               </a:lnSpc>
@@ -6178,7 +6178,7 @@
             </a:r>
           </a:p>
           <a:p>
-            <a:pPr marL="742950" lvl="1" indent="-285750" eaLnBrk="0" fontAlgn="base" hangingPunct="0">
+            <a:pPr marL="742950" lvl="1" indent="-285750" algn="just" eaLnBrk="0" fontAlgn="base" hangingPunct="0">
               <a:lnSpc>
                 <a:spcPct val="100000"/>
               </a:lnSpc>
@@ -6206,7 +6206,7 @@
             </a:r>
           </a:p>
           <a:p>
-            <a:pPr marL="0" marR="0" lvl="0" indent="0" algn="l" defTabSz="914400" rtl="0" eaLnBrk="0" fontAlgn="base" latinLnBrk="0" hangingPunct="0">
+            <a:pPr marL="0" marR="0" lvl="0" indent="0" defTabSz="914400" rtl="0" eaLnBrk="0" fontAlgn="base" latinLnBrk="0" hangingPunct="0">
               <a:lnSpc>
                 <a:spcPct val="100000"/>
               </a:lnSpc>
@@ -6232,7 +6232,7 @@
             </a:endParaRPr>
           </a:p>
           <a:p>
-            <a:pPr marL="0" marR="0" lvl="0" indent="0" algn="l" defTabSz="914400" rtl="0" eaLnBrk="0" fontAlgn="base" latinLnBrk="0" hangingPunct="0">
+            <a:pPr marL="0" marR="0" lvl="0" indent="0" defTabSz="914400" rtl="0" eaLnBrk="0" fontAlgn="base" latinLnBrk="0" hangingPunct="0">
               <a:lnSpc>
                 <a:spcPct val="100000"/>
               </a:lnSpc>
@@ -6258,7 +6258,7 @@
             </a:endParaRPr>
           </a:p>
           <a:p>
-            <a:pPr marL="0" marR="0" lvl="0" indent="0" algn="l" defTabSz="914400" rtl="0" eaLnBrk="0" fontAlgn="base" latinLnBrk="0" hangingPunct="0">
+            <a:pPr marL="0" marR="0" lvl="0" indent="0" defTabSz="914400" rtl="0" eaLnBrk="0" fontAlgn="base" latinLnBrk="0" hangingPunct="0">
               <a:lnSpc>
                 <a:spcPct val="100000"/>
               </a:lnSpc>
@@ -6297,7 +6297,7 @@
             </a:endParaRPr>
           </a:p>
           <a:p>
-            <a:pPr marL="742950" lvl="1" indent="-285750" eaLnBrk="0" fontAlgn="base" hangingPunct="0">
+            <a:pPr marL="742950" lvl="1" indent="-285750" algn="just" eaLnBrk="0" fontAlgn="base" hangingPunct="0">
               <a:lnSpc>
                 <a:spcPct val="100000"/>
               </a:lnSpc>
@@ -6325,7 +6325,7 @@
             </a:r>
           </a:p>
           <a:p>
-            <a:pPr marL="742950" lvl="1" indent="-285750" eaLnBrk="0" fontAlgn="base" hangingPunct="0">
+            <a:pPr marL="742950" lvl="1" indent="-285750" algn="just" eaLnBrk="0" fontAlgn="base" hangingPunct="0">
               <a:lnSpc>
                 <a:spcPct val="100000"/>
               </a:lnSpc>
@@ -6385,7 +6385,7 @@
             </a:r>
           </a:p>
           <a:p>
-            <a:pPr marL="742950" lvl="1" indent="-285750" eaLnBrk="0" fontAlgn="base" hangingPunct="0">
+            <a:pPr marL="742950" lvl="1" indent="-285750" algn="just" eaLnBrk="0" fontAlgn="base" hangingPunct="0">
               <a:lnSpc>
                 <a:spcPct val="100000"/>
               </a:lnSpc>
@@ -7172,7 +7172,7 @@
           </a:bodyPr>
           <a:lstStyle/>
           <a:p>
-            <a:pPr marL="285750" marR="0" lvl="0" indent="-285750" algn="l" defTabSz="914400" rtl="0" eaLnBrk="0" fontAlgn="base" latinLnBrk="0" hangingPunct="0">
+            <a:pPr marL="285750" marR="0" lvl="0" indent="-285750" defTabSz="914400" rtl="0" eaLnBrk="0" fontAlgn="base" latinLnBrk="0" hangingPunct="0">
               <a:lnSpc>
                 <a:spcPct val="100000"/>
               </a:lnSpc>
@@ -7202,7 +7202,7 @@
             </a:r>
           </a:p>
           <a:p>
-            <a:pPr marL="285750" marR="0" lvl="0" indent="-285750" algn="l" defTabSz="914400" rtl="0" eaLnBrk="0" fontAlgn="base" latinLnBrk="0" hangingPunct="0">
+            <a:pPr marL="285750" marR="0" lvl="0" indent="-285750" defTabSz="914400" rtl="0" eaLnBrk="0" fontAlgn="base" latinLnBrk="0" hangingPunct="0">
               <a:lnSpc>
                 <a:spcPct val="100000"/>
               </a:lnSpc>
@@ -7229,7 +7229,7 @@
             </a:endParaRPr>
           </a:p>
           <a:p>
-            <a:pPr marL="285750" marR="0" lvl="0" indent="-285750" algn="l" defTabSz="914400" rtl="0" eaLnBrk="0" fontAlgn="base" latinLnBrk="0" hangingPunct="0">
+            <a:pPr marL="285750" marR="0" lvl="0" indent="-285750" defTabSz="914400" rtl="0" eaLnBrk="0" fontAlgn="base" latinLnBrk="0" hangingPunct="0">
               <a:lnSpc>
                 <a:spcPct val="100000"/>
               </a:lnSpc>
@@ -7311,7 +7311,7 @@
             </a:r>
           </a:p>
           <a:p>
-            <a:pPr marL="285750" marR="0" lvl="0" indent="-285750" algn="l" defTabSz="914400" rtl="0" eaLnBrk="0" fontAlgn="base" latinLnBrk="0" hangingPunct="0">
+            <a:pPr marL="285750" marR="0" lvl="0" indent="-285750" defTabSz="914400" rtl="0" eaLnBrk="0" fontAlgn="base" latinLnBrk="0" hangingPunct="0">
               <a:lnSpc>
                 <a:spcPct val="100000"/>
               </a:lnSpc>
@@ -7338,7 +7338,7 @@
             </a:endParaRPr>
           </a:p>
           <a:p>
-            <a:pPr marL="285750" marR="0" lvl="0" indent="-285750" algn="l" defTabSz="914400" rtl="0" eaLnBrk="0" fontAlgn="base" latinLnBrk="0" hangingPunct="0">
+            <a:pPr marL="285750" marR="0" lvl="0" indent="-285750" defTabSz="914400" rtl="0" eaLnBrk="0" fontAlgn="base" latinLnBrk="0" hangingPunct="0">
               <a:lnSpc>
                 <a:spcPct val="100000"/>
               </a:lnSpc>
@@ -7400,7 +7400,7 @@
             </a:r>
           </a:p>
           <a:p>
-            <a:pPr marL="742950" lvl="1" indent="-285750" eaLnBrk="0" fontAlgn="base" hangingPunct="0">
+            <a:pPr marL="742950" lvl="1" indent="-285750" algn="just" eaLnBrk="0" fontAlgn="base" hangingPunct="0">
               <a:lnSpc>
                 <a:spcPct val="100000"/>
               </a:lnSpc>
@@ -7427,7 +7427,7 @@
             </a:r>
           </a:p>
           <a:p>
-            <a:pPr marL="742950" lvl="1" indent="-285750" eaLnBrk="0" fontAlgn="base" hangingPunct="0">
+            <a:pPr marL="742950" lvl="1" indent="-285750" algn="just" eaLnBrk="0" fontAlgn="base" hangingPunct="0">
               <a:lnSpc>
                 <a:spcPct val="100000"/>
               </a:lnSpc>
@@ -7454,7 +7454,7 @@
             </a:r>
           </a:p>
           <a:p>
-            <a:pPr marL="742950" lvl="1" indent="-285750" eaLnBrk="0" fontAlgn="base" hangingPunct="0">
+            <a:pPr marL="742950" lvl="1" indent="-285750" algn="just" eaLnBrk="0" fontAlgn="base" hangingPunct="0">
               <a:lnSpc>
                 <a:spcPct val="100000"/>
               </a:lnSpc>
@@ -9593,7 +9593,7 @@
         <p:spPr>
           <a:xfrm>
             <a:off x="836612" y="1652521"/>
-            <a:ext cx="5451066" cy="2598967"/>
+            <a:ext cx="5259388" cy="2598967"/>
           </a:xfrm>
         </p:spPr>
         <p:txBody>
@@ -9612,7 +9612,7 @@
             </a:r>
           </a:p>
           <a:p>
-            <a:pPr marL="742950" lvl="1" indent="-285750">
+            <a:pPr marL="742950" lvl="1" indent="-285750" algn="just">
               <a:buFont typeface="Arial" panose="020B0604020202020204" pitchFamily="34" charset="0"/>
               <a:buChar char="•"/>
             </a:pPr>
@@ -9634,7 +9634,7 @@
             </a:r>
           </a:p>
           <a:p>
-            <a:pPr marL="742950" lvl="1" indent="-285750">
+            <a:pPr marL="742950" lvl="1" indent="-285750" algn="just">
               <a:buFont typeface="Arial" panose="020B0604020202020204" pitchFamily="34" charset="0"/>
               <a:buChar char="•"/>
             </a:pPr>
@@ -9656,7 +9656,7 @@
             </a:r>
           </a:p>
           <a:p>
-            <a:pPr marL="742950" lvl="1" indent="-285750">
+            <a:pPr marL="742950" lvl="1" indent="-285750" algn="just">
               <a:buFont typeface="Arial" panose="020B0604020202020204" pitchFamily="34" charset="0"/>
               <a:buChar char="•"/>
             </a:pPr>
@@ -9670,7 +9670,7 @@
             </a:r>
           </a:p>
           <a:p>
-            <a:pPr marL="1200150" lvl="2" indent="-285750">
+            <a:pPr marL="1200150" lvl="2" indent="-285750" algn="just">
               <a:buFont typeface="Courier New" panose="02070309020205020404" pitchFamily="49" charset="0"/>
               <a:buChar char="o"/>
             </a:pPr>
@@ -9716,8 +9716,8 @@
         </p:blipFill>
         <p:spPr>
           <a:xfrm>
-            <a:off x="6287679" y="1561727"/>
-            <a:ext cx="5067712" cy="4400718"/>
+            <a:off x="6429079" y="1561727"/>
+            <a:ext cx="4926311" cy="4277928"/>
           </a:xfrm>
           <a:prstGeom prst="rect">
             <a:avLst/>
